--- a/examples/slides/output/narrative_examples.pptx
+++ b/examples/slides/output/narrative_examples.pptx
@@ -518,11 +518,26 @@
           <a:p>
             <a:r>
               <a:rPr lang="en-US" dirty="0"/>
-              <a:t>PATTERN: title slide. The first slide carries the talk title, the presenter, affiliation and date; it has no topic-title chrome and no page number.
-Design rules shown: logo placeholder top left; title in a horizontal band with a thin accent bar on its left (0.1 x 1.86 in) and a full-width accent rule near the bottom (y 6.83); the title wraps onto two lines inside one text box; presenter, affiliation and date right-aligned under the title. The presenter's name appears only here (and in literature citations), never in notes, code or other slides.
-Illustrative example: a design example, not a real study. Placeholders (n = XX) stand where a real deck would put numbers from its own result tables.</a:t>
-            </a:r>
+              <a:t>PATTERN: title slide. The first slide carries the talk title, the presenter, affiliation and date; it has no topic-title chrome and no page number.</a:t>
+            </a:r>
+          </a:p>
+          <a:p>
             <a:endParaRPr lang="en-US" dirty="0"/>
+          </a:p>
+          <a:p>
+            <a:r>
+              <a:rPr lang="en-US" dirty="0"/>
+              <a:t>Design rules shown: logo placeholder top left; title in a horizontal band with a thin accent bar on its left (0.1 x 1.86 in) and a full-width accent rule near the bottom (y 6.83); the title wraps onto two lines inside one text box; presenter, affiliation and date right-aligned under the title. The presenter's name appears only here (and in literature citations), never in notes, code or other slides.</a:t>
+            </a:r>
+          </a:p>
+          <a:p>
+            <a:endParaRPr lang="en-US" dirty="0"/>
+          </a:p>
+          <a:p>
+            <a:r>
+              <a:rPr lang="en-US" dirty="0"/>
+              <a:t>Illustrative example: a design example, not a real study. Placeholders (n = XX) stand where a real deck would put numbers from its own result tables.</a:t>
+            </a:r>
           </a:p>
         </p:txBody>
       </p:sp>
@@ -608,13 +623,44 @@
           <a:p>
             <a:r>
               <a:rPr lang="en-US" dirty="0"/>
-              <a:t>PATTERN: timeline / study design. Use it to define the time axis of a survival analysis (time zero, exposure window, event, censoring) or to show project phases. Three to six milestones.
-Design rules shown: one horizontal axis with an arrow head; round markers on the axis, filled accent for the two that define the endpoint (time zero and event), white with a grey ring for the rest; labels alternate above and below so they never collide; one icon per milestone from one icon source, all the same size; a thin grey stem joins each marker to its label.
-Numbers: 686 patients and 299 recurrence-or-death events from lifelines load_gbsg2; the timeline itself is the illustrative study's design, not GBSG2's.
-Icons: Health Icons biopsy, tissue, hospital, regular-patient, chart-line (CC0).
-Illustrative example: a design example, not a real study. Placeholders (n = XX) stand where a real deck would put numbers from its own result tables.</a:t>
-            </a:r>
+              <a:t>PATTERN: timeline / study design. Use it to define the time axis of a survival analysis (time zero, exposure window, event, censoring) or to show project phases. Three to six milestones.</a:t>
+            </a:r>
+          </a:p>
+          <a:p>
             <a:endParaRPr lang="en-US" dirty="0"/>
+          </a:p>
+          <a:p>
+            <a:r>
+              <a:rPr lang="en-US" dirty="0"/>
+              <a:t>Design rules shown: one horizontal axis with an arrow head; round markers on the axis, filled accent for the two that define the endpoint (time zero and event), white with a gray ring for the rest; labels alternate above and below so they never collide; one icon per milestone from one icon source, all the same size; a thin gray stem joins each marker to its label.</a:t>
+            </a:r>
+          </a:p>
+          <a:p>
+            <a:endParaRPr lang="en-US" dirty="0"/>
+          </a:p>
+          <a:p>
+            <a:r>
+              <a:rPr lang="en-US" dirty="0"/>
+              <a:t>Numbers: 686 patients and 299 recurrence-or-death events from lifelines load_gbsg2; the timeline itself is the illustrative study's design, not GBSG2's.</a:t>
+            </a:r>
+          </a:p>
+          <a:p>
+            <a:endParaRPr lang="en-US" dirty="0"/>
+          </a:p>
+          <a:p>
+            <a:r>
+              <a:rPr lang="en-US" dirty="0"/>
+              <a:t>Icons: Health Icons biopsy, tissue, hospital, regular-patient, chart-line (CC0).</a:t>
+            </a:r>
+          </a:p>
+          <a:p>
+            <a:endParaRPr lang="en-US" dirty="0"/>
+          </a:p>
+          <a:p>
+            <a:r>
+              <a:rPr lang="en-US" dirty="0"/>
+              <a:t>Illustrative example: a design example, not a real study. Placeholders (n = XX) stand where a real deck would put numbers from its own result tables.</a:t>
+            </a:r>
           </a:p>
         </p:txBody>
       </p:sp>
@@ -700,11 +746,26 @@
           <a:p>
             <a:r>
               <a:rPr lang="en-US" dirty="0"/>
-              <a:t>PATTERN: two-column comparison (prior approaches vs this work, or pros vs cons). Use it when the audience needs the difference on a few named criteria, not a literature review.
-Design rules shown: one row per criterion with the criterion name on the left, so the two columns are read across, not down; markers drawn from native shapes (accent check = has it, grey cross = lacks it, grey dash = partly) instead of symbol-font glyphs that may be missing on another machine; 'This work' column on a tint band with an accent header; rows separated by thin rules. Be honest: show where prior work is better (validation here) and say so in the take-home line.
-Illustrative example: a design example, not a real study. Placeholders (n = XX) stand where a real deck would put numbers from its own result tables.</a:t>
-            </a:r>
+              <a:t>PATTERN: two-column comparison (prior approaches vs this work, or pros vs cons). Use it when the audience needs the difference on a few named criteria, not a literature review.</a:t>
+            </a:r>
+          </a:p>
+          <a:p>
             <a:endParaRPr lang="en-US" dirty="0"/>
+          </a:p>
+          <a:p>
+            <a:r>
+              <a:rPr lang="en-US" dirty="0"/>
+              <a:t>Design rules shown: one row per criterion with the criterion name on the left, so the two columns are read across, not down; markers drawn from native shapes (accent check = has it, gray cross = lacks it, gray dash = partly) instead of symbol-font glyphs that may be missing on another machine; 'This work' column on a tint band with an accent header; rows separated by thin rules. Be honest: show where prior work is better (validation here) and say so in the take-home line.</a:t>
+            </a:r>
+          </a:p>
+          <a:p>
+            <a:endParaRPr lang="en-US" dirty="0"/>
+          </a:p>
+          <a:p>
+            <a:r>
+              <a:rPr lang="en-US" dirty="0"/>
+              <a:t>Illustrative example: a design example, not a real study. Placeholders (n = XX) stand where a real deck would put numbers from its own result tables.</a:t>
+            </a:r>
           </a:p>
         </p:txBody>
       </p:sp>
@@ -790,11 +851,26 @@
           <a:p>
             <a:r>
               <a:rPr lang="en-US" dirty="0"/>
-              <a:t>PATTERN: limitations. Use it before the summary, so the take-home messages are heard with their caveats. Three or four limitations, each paired with what it affects; a list without consequences reads as ritual.
-Design rules shown: calm grey styling (no accent: limitations are not highlights); numbered rows with the limitation in bold and its consequence in the right column; thin rules between rows; the take-home line names the status of the results (exploratory) and what is needed next.
-Illustrative example: a design example, not a real study. Placeholders (n = XX) stand where a real deck would put numbers from its own result tables.</a:t>
-            </a:r>
+              <a:t>PATTERN: limitations. Use it before the summary, so the take-home messages are heard with their caveats. Three or four limitations, each paired with what it affects; a list without consequences reads as ritual.</a:t>
+            </a:r>
+          </a:p>
+          <a:p>
             <a:endParaRPr lang="en-US" dirty="0"/>
+          </a:p>
+          <a:p>
+            <a:r>
+              <a:rPr lang="en-US" dirty="0"/>
+              <a:t>Design rules shown: calm gray styling (no accent: limitations are not highlights); numbered rows with the limitation in bold and its consequence in the right column; thin rules between rows; the take-home line names the status of the results (exploratory) and what is needed next.</a:t>
+            </a:r>
+          </a:p>
+          <a:p>
+            <a:endParaRPr lang="en-US" dirty="0"/>
+          </a:p>
+          <a:p>
+            <a:r>
+              <a:rPr lang="en-US" dirty="0"/>
+              <a:t>Illustrative example: a design example, not a real study. Placeholders (n = XX) stand where a real deck would put numbers from its own result tables.</a:t>
+            </a:r>
           </a:p>
         </p:txBody>
       </p:sp>
@@ -880,11 +956,26 @@
           <a:p>
             <a:r>
               <a:rPr lang="en-US" dirty="0"/>
-              <a:t>PATTERN: key takeaways. Use it as the last content slide: three numbered messages the audience should leave with, each backed by one line of evidence from an earlier slide.
-Design rules shown: accent numerals (44 pt) as the only colour; each takeaway a short bold claim in black, then one grey evidence line; thin rules between rows; no conclusion box, because the takeaways are the conclusion. No number may appear here that was not on an earlier result slide, and the wording keeps the earlier qualifiers (candidate, exploratory).
-Illustrative example: a design example, not a real study. Placeholders (n = XX) stand where a real deck would put numbers from its own result tables.</a:t>
-            </a:r>
+              <a:t>PATTERN: key takeaways. Use it as the last content slide: three numbered messages the audience should leave with, each backed by one line of evidence from an earlier slide.</a:t>
+            </a:r>
+          </a:p>
+          <a:p>
             <a:endParaRPr lang="en-US" dirty="0"/>
+          </a:p>
+          <a:p>
+            <a:r>
+              <a:rPr lang="en-US" dirty="0"/>
+              <a:t>Design rules shown: accent numerals (44 pt) as the only color; each takeaway a short bold claim in black, then one gray evidence line; thin rules between rows; no conclusion box, because the takeaways are the conclusion. No number may appear here that was not on an earlier result slide, and the wording keeps the earlier qualifiers (candidate, exploratory).</a:t>
+            </a:r>
+          </a:p>
+          <a:p>
+            <a:endParaRPr lang="en-US" dirty="0"/>
+          </a:p>
+          <a:p>
+            <a:r>
+              <a:rPr lang="en-US" dirty="0"/>
+              <a:t>Illustrative example: a design example, not a real study. Placeholders (n = XX) stand where a real deck would put numbers from its own result tables.</a:t>
+            </a:r>
           </a:p>
         </p:txBody>
       </p:sp>
@@ -970,12 +1061,35 @@
           <a:p>
             <a:r>
               <a:rPr lang="en-US" dirty="0"/>
-              <a:t>PATTERN: next steps / roadmap. Use it at the end of a progress talk: three time-boxed cards, the first one highlighted because it is the decision point.
-Design rules shown: equal cards on one grid under a thin grey time arrow; a dark header with the timeframe (accent only for the first, the current priority); one icon, a short title and two bullets per card; the take-home line says what the plan depends on.
-Icons: lucide/users, lucide/list-checks, lucide/code (ISC; code is MIT via Feather).
-Illustrative example: a design example, not a real study. Placeholders (n = XX) stand where a real deck would put numbers from its own result tables.</a:t>
-            </a:r>
+              <a:t>PATTERN: next steps / roadmap. Use it at the end of a progress talk: three time-boxed cards, the first one highlighted because it is the decision point.</a:t>
+            </a:r>
+          </a:p>
+          <a:p>
             <a:endParaRPr lang="en-US" dirty="0"/>
+          </a:p>
+          <a:p>
+            <a:r>
+              <a:rPr lang="en-US" dirty="0"/>
+              <a:t>Design rules shown: equal cards on one grid under a thin gray time arrow; a dark header with the timeframe (accent only for the first, the current priority); one icon, a short title and two bullets per card; the take-home line says what the plan depends on.</a:t>
+            </a:r>
+          </a:p>
+          <a:p>
+            <a:endParaRPr lang="en-US" dirty="0"/>
+          </a:p>
+          <a:p>
+            <a:r>
+              <a:rPr lang="en-US" dirty="0"/>
+              <a:t>Icons: lucide/users, lucide/list-checks, lucide/code (ISC; code is MIT via Feather).</a:t>
+            </a:r>
+          </a:p>
+          <a:p>
+            <a:endParaRPr lang="en-US" dirty="0"/>
+          </a:p>
+          <a:p>
+            <a:r>
+              <a:rPr lang="en-US" dirty="0"/>
+              <a:t>Illustrative example: a design example, not a real study. Placeholders (n = XX) stand where a real deck would put numbers from its own result tables.</a:t>
+            </a:r>
           </a:p>
         </p:txBody>
       </p:sp>
@@ -1061,11 +1175,26 @@
           <a:p>
             <a:r>
               <a:rPr lang="en-US" dirty="0"/>
-              <a:t>PATTERN: questions / thank you. Use the same frame as the title slide so the talk visibly closes; leave it up during questions, with a way to reach the team and the code.
-Design rules shown: same logo, accent bar and bottom rule as the title slide; no page number; contact as a generic address (a team or lab address, not a person's name); small grey icons in front of each contact line.
-Illustrative example: a design example, not a real study. Placeholders (n = XX) stand where a real deck would put numbers from its own result tables.</a:t>
-            </a:r>
+              <a:t>PATTERN: questions / thank you. Use the same frame as the title slide so the talk visibly closes; leave it up during questions, with a way to reach the team and the code.</a:t>
+            </a:r>
+          </a:p>
+          <a:p>
             <a:endParaRPr lang="en-US" dirty="0"/>
+          </a:p>
+          <a:p>
+            <a:r>
+              <a:rPr lang="en-US" dirty="0"/>
+              <a:t>Design rules shown: same logo, accent bar and bottom rule as the title slide; no page number; contact as a generic address (a team or lab address, not a person's name); small gray icons in front of each contact line.</a:t>
+            </a:r>
+          </a:p>
+          <a:p>
+            <a:endParaRPr lang="en-US" dirty="0"/>
+          </a:p>
+          <a:p>
+            <a:r>
+              <a:rPr lang="en-US" dirty="0"/>
+              <a:t>Illustrative example: a design example, not a real study. Placeholders (n = XX) stand where a real deck would put numbers from its own result tables.</a:t>
+            </a:r>
           </a:p>
         </p:txBody>
       </p:sp>
@@ -1151,11 +1280,26 @@
           <a:p>
             <a:r>
               <a:rPr lang="en-US" dirty="0"/>
-              <a:t>PATTERN: supplementary slide, hidden in the slide show (slide.hidden = true, show="0"). Use it for the dense settings table you expect a question about; it stays in the file and the PDF but is skipped when presenting.
-Design rules shown: same chrome as a main slide (topic title, conclusion, abbreviations); the three-line table may be denser (13 pt, nine rows) because it is read on demand; first column bold and left-aligned, the others centred. Values marked XX are placeholders; the settings shown are illustrative choices.
-Illustrative example: a design example, not a real study. Placeholders (n = XX) stand where a real deck would put numbers from its own result tables.</a:t>
-            </a:r>
+              <a:t>PATTERN: supplementary slide, hidden in the slide show (slide.hidden = true, show="0"). Use it for the dense settings table you expect a question about; it stays in the file and the PDF but is skipped when presenting.</a:t>
+            </a:r>
+          </a:p>
+          <a:p>
             <a:endParaRPr lang="en-US" dirty="0"/>
+          </a:p>
+          <a:p>
+            <a:r>
+              <a:rPr lang="en-US" dirty="0"/>
+              <a:t>Design rules shown: same chrome as a main slide (topic title, conclusion, abbreviations); the three-line table may be denser (13 pt, nine rows) because it is read on demand; first column bold and left-aligned, the others centered. Values marked XX are placeholders; the settings shown are illustrative choices.</a:t>
+            </a:r>
+          </a:p>
+          <a:p>
+            <a:endParaRPr lang="en-US" dirty="0"/>
+          </a:p>
+          <a:p>
+            <a:r>
+              <a:rPr lang="en-US" dirty="0"/>
+              <a:t>Illustrative example: a design example, not a real study. Placeholders (n = XX) stand where a real deck would put numbers from its own result tables.</a:t>
+            </a:r>
           </a:p>
         </p:txBody>
       </p:sp>
@@ -1241,11 +1385,26 @@
           <a:p>
             <a:r>
               <a:rPr lang="en-US" dirty="0"/>
-              <a:t>PATTERN: credits. Use it as the very last slide (after the supplementary slides) whenever the deck uses third-party icons, images or data: list every source actually used with its licence, and the author for attribution licences (CC BY). CC BY icons are also credited on the slide where they appear.
-Design rules shown: one three-line table (source, items, licence), first column left, others centred; data and literature sources in plain text below. Authors of icons and references are the only person names in the deck besides the presenter placeholder.
-Illustrative example: a design example, not a real study. Placeholders (n = XX) stand where a real deck would put numbers from its own result tables.</a:t>
-            </a:r>
+              <a:t>PATTERN: credits. Use it as the very last slide (after the supplementary slides) whenever the deck uses third-party icons, images or data: list every source actually used with its license, and the author for attribution licenses (CC BY). CC BY icons are also credited on the slide where they appear.</a:t>
+            </a:r>
+          </a:p>
+          <a:p>
             <a:endParaRPr lang="en-US" dirty="0"/>
+          </a:p>
+          <a:p>
+            <a:r>
+              <a:rPr lang="en-US" dirty="0"/>
+              <a:t>Design rules shown: one three-line table (source, items, license), first column left, others centered; data and literature sources in plain text below. Authors of icons and references are the only person names in the deck besides the presenter placeholder.</a:t>
+            </a:r>
+          </a:p>
+          <a:p>
+            <a:endParaRPr lang="en-US" dirty="0"/>
+          </a:p>
+          <a:p>
+            <a:r>
+              <a:rPr lang="en-US" dirty="0"/>
+              <a:t>Illustrative example: a design example, not a real study. Placeholders (n = XX) stand where a real deck would put numbers from its own result tables.</a:t>
+            </a:r>
           </a:p>
         </p:txBody>
       </p:sp>
@@ -1331,11 +1490,26 @@
           <a:p>
             <a:r>
               <a:rPr lang="en-US" dirty="0"/>
-              <a:t>PATTERN: agenda / roadmap. Show it after the title, and again at each section start with that section highlighted, so the audience always knows where they are. Four to six sections; more is a table of contents.
-Design rules shown: numbered rows; the current section has an accent numeral, black name, tint band and accent edge bar; the other sections are muted grey; one short subtitle per section, no bullets. Reuse the same geometry on every repeat so only the highlight moves.
-Illustrative example: a design example, not a real study. Placeholders (n = XX) stand where a real deck would put numbers from its own result tables.</a:t>
-            </a:r>
+              <a:t>PATTERN: agenda / roadmap. Show it after the title, and again at each section start with that section highlighted, so the audience always knows where they are. Four to six sections; more is a table of contents.</a:t>
+            </a:r>
+          </a:p>
+          <a:p>
             <a:endParaRPr lang="en-US" dirty="0"/>
+          </a:p>
+          <a:p>
+            <a:r>
+              <a:rPr lang="en-US" dirty="0"/>
+              <a:t>Design rules shown: numbered rows; the current section has an accent numeral, black name, tint band and accent edge bar; the other sections are muted gray; one short subtitle per section, no bullets. Reuse the same geometry on every repeat so only the highlight moves.</a:t>
+            </a:r>
+          </a:p>
+          <a:p>
+            <a:endParaRPr lang="en-US" dirty="0"/>
+          </a:p>
+          <a:p>
+            <a:r>
+              <a:rPr lang="en-US" dirty="0"/>
+              <a:t>Illustrative example: a design example, not a real study. Placeholders (n = XX) stand where a real deck would put numbers from its own result tables.</a:t>
+            </a:r>
           </a:p>
         </p:txBody>
       </p:sp>
@@ -1421,11 +1595,26 @@
           <a:p>
             <a:r>
               <a:rPr lang="en-US" dirty="0"/>
-              <a:t>PATTERN: section divider. Use it between major blocks of a long talk (20 minutes or more) as a pause; in a short talk the repeated agenda slide does the same job.
-Design rules shown: no topic title, nothing to read except the number and the section name (the same words as on the agenda); one accent numeral, a thin grey rule, white space. The page number stays.
-Illustrative example: a design example, not a real study. Placeholders (n = XX) stand where a real deck would put numbers from its own result tables.</a:t>
-            </a:r>
+              <a:t>PATTERN: section divider. Use it between major blocks of a long talk (20 minutes or more) as a pause; in a short talk the repeated agenda slide does the same job.</a:t>
+            </a:r>
+          </a:p>
+          <a:p>
             <a:endParaRPr lang="en-US" dirty="0"/>
+          </a:p>
+          <a:p>
+            <a:r>
+              <a:rPr lang="en-US" dirty="0"/>
+              <a:t>Design rules shown: no topic title, nothing to read except the number and the section name (the same words as on the agenda); one accent numeral, a thin gray rule, white space. The page number stays.</a:t>
+            </a:r>
+          </a:p>
+          <a:p>
+            <a:endParaRPr lang="en-US" dirty="0"/>
+          </a:p>
+          <a:p>
+            <a:r>
+              <a:rPr lang="en-US" dirty="0"/>
+              <a:t>Illustrative example: a design example, not a real study. Placeholders (n = XX) stand where a real deck would put numbers from its own result tables.</a:t>
+            </a:r>
           </a:p>
         </p:txBody>
       </p:sp>
@@ -1511,12 +1700,35 @@
           <a:p>
             <a:r>
               <a:rPr lang="en-US" dirty="0"/>
-              <a:t>PATTERN: big statement. Use it to open the background with the one sentence the audience should accept before the study makes sense; two or three bullets give the support, a citation backs the claim.
-Design rules shown: the statement is a complete sentence in 30 pt bold black next to a thin accent bar; bullets 18 pt grey with a bold lead phrase; the citation sits in the source position, 9 pt serif, journal in italics, format 'Surname, Given, et al. Journal vol.issue (year): pages'. No separate conclusion box: the statement is the take-home line.
-Reference: CLAM, data-efficient weakly supervised computational pathology on whole-slide images; PMID 33649564, doi 10.1038/s41551-020-00682-w (checked against PubMed metadata).
-Illustrative example: a design example, not a real study. Placeholders (n = XX) stand where a real deck would put numbers from its own result tables.</a:t>
-            </a:r>
+              <a:t>PATTERN: big statement. Use it to open the background with the one sentence the audience should accept before the study makes sense; two or three bullets give the support, a citation backs the claim.</a:t>
+            </a:r>
+          </a:p>
+          <a:p>
             <a:endParaRPr lang="en-US" dirty="0"/>
+          </a:p>
+          <a:p>
+            <a:r>
+              <a:rPr lang="en-US" dirty="0"/>
+              <a:t>Design rules shown: the statement is a complete sentence in 30 pt bold black next to a thin accent bar; bullets 18 pt gray with a bold lead phrase; the citation sits in the source position, 9 pt serif, journal in italics, format 'Surname, Given, et al. Journal vol.issue (year): pages'. No separate conclusion box: the statement is the take-home line.</a:t>
+            </a:r>
+          </a:p>
+          <a:p>
+            <a:endParaRPr lang="en-US" dirty="0"/>
+          </a:p>
+          <a:p>
+            <a:r>
+              <a:rPr lang="en-US" dirty="0"/>
+              <a:t>Reference: CLAM, data-efficient weakly supervised computational pathology on whole-slide images; PMID 33649564, doi 10.1038/s41551-020-00682-w (checked against PubMed metadata).</a:t>
+            </a:r>
+          </a:p>
+          <a:p>
+            <a:endParaRPr lang="en-US" dirty="0"/>
+          </a:p>
+          <a:p>
+            <a:r>
+              <a:rPr lang="en-US" dirty="0"/>
+              <a:t>Illustrative example: a design example, not a real study. Placeholders (n = XX) stand where a real deck would put numbers from its own result tables.</a:t>
+            </a:r>
           </a:p>
         </p:txBody>
       </p:sp>
@@ -1602,12 +1814,35 @@
           <a:p>
             <a:r>
               <a:rPr lang="en-US" dirty="0"/>
-              <a:t>PATTERN: problem → approach → impact. Use it once, early, to frame the whole talk in three steps the audience can repeat. Each column answers one question: what is wrong, what we do, what changes.
-Design rules shown: three equal columns on one grid; one icon per column, same size (0.9 in) and same colour; a small accent tag, a short header (four or five words) and two lines of body text; thin grey arrows between the columns; a single take-home line at the bottom.
-Icons: lucide/scan-eye, lucide/brain-circuit, lucide/users (ISC).
-Illustrative example: a design example, not a real study. Placeholders (n = XX) stand where a real deck would put numbers from its own result tables.</a:t>
-            </a:r>
+              <a:t>PATTERN: problem → approach → impact. Use it once, early, to frame the whole talk in three steps the audience can repeat. Each column answers one question: what is wrong, what we do, what changes.</a:t>
+            </a:r>
+          </a:p>
+          <a:p>
             <a:endParaRPr lang="en-US" dirty="0"/>
+          </a:p>
+          <a:p>
+            <a:r>
+              <a:rPr lang="en-US" dirty="0"/>
+              <a:t>Design rules shown: three equal columns on one grid; one icon per column, same size (0.9 in) and same color; a small accent tag, a short header (four or five words) and two lines of body text; thin gray arrows between the columns; a single take-home line at the bottom.</a:t>
+            </a:r>
+          </a:p>
+          <a:p>
+            <a:endParaRPr lang="en-US" dirty="0"/>
+          </a:p>
+          <a:p>
+            <a:r>
+              <a:rPr lang="en-US" dirty="0"/>
+              <a:t>Icons: lucide/scan-eye, lucide/brain-circuit, lucide/users (ISC).</a:t>
+            </a:r>
+          </a:p>
+          <a:p>
+            <a:endParaRPr lang="en-US" dirty="0"/>
+          </a:p>
+          <a:p>
+            <a:r>
+              <a:rPr lang="en-US" dirty="0"/>
+              <a:t>Illustrative example: a design example, not a real study. Placeholders (n = XX) stand where a real deck would put numbers from its own result tables.</a:t>
+            </a:r>
           </a:p>
         </p:txBody>
       </p:sp>
@@ -1693,12 +1928,35 @@
           <a:p>
             <a:r>
               <a:rPr lang="en-US" dirty="0"/>
-              <a:t>PATTERN: data modalities grid. Use it before the methods, so the audience knows what goes in and how much of each there is. One card per modality; four in a row, or 2 x 2 when each card needs two lines more.
-Design rules shown: equal cards on one grid with a thin accent top edge; one illustration per card at the same size (1.5 in square box) from one icon source; a header, one line of detail and the count in accent. Counts are placeholders (n = XX) here; in a real deck they come from the cohort table and are the same numbers as on the cohort slide.
-Icons: Bioicons glass-slide (Servier Medical Art, CC BY 3.0) and confocal-microscope (DBCLS TogoTV, CC BY 4.0) need attribution, given on the source line and on the credits slide; single-cell-umap (James Lloyd) and patient (Marcel Tisch) are CC0.
-Illustrative example: a design example, not a real study. Placeholders (n = XX) stand where a real deck would put numbers from its own result tables.</a:t>
-            </a:r>
+              <a:t>PATTERN: data modalities grid. Use it before the methods, so the audience knows what goes in and how much of each there is. One card per modality; four in a row, or 2 x 2 when each card needs two lines more.</a:t>
+            </a:r>
+          </a:p>
+          <a:p>
             <a:endParaRPr lang="en-US" dirty="0"/>
+          </a:p>
+          <a:p>
+            <a:r>
+              <a:rPr lang="en-US" dirty="0"/>
+              <a:t>Design rules shown: equal cards on one grid with a thin accent top edge; one illustration per card at the same size (1.5 in square box) from one icon source; a header, one line of detail and the count in accent. Counts are placeholders (n = XX) here; in a real deck they come from the cohort table and are the same numbers as on the cohort slide.</a:t>
+            </a:r>
+          </a:p>
+          <a:p>
+            <a:endParaRPr lang="en-US" dirty="0"/>
+          </a:p>
+          <a:p>
+            <a:r>
+              <a:rPr lang="en-US" dirty="0"/>
+              <a:t>Icons: Bioicons glass-slide (Servier Medical Art, CC BY 3.0) and confocal-microscope (DBCLS TogoTV, CC BY 4.0) need attribution, given on the source line and on the credits slide; single-cell-umap (James Lloyd) and patient (Marcel Tisch) are CC0.</a:t>
+            </a:r>
+          </a:p>
+          <a:p>
+            <a:endParaRPr lang="en-US" dirty="0"/>
+          </a:p>
+          <a:p>
+            <a:r>
+              <a:rPr lang="en-US" dirty="0"/>
+              <a:t>Illustrative example: a design example, not a real study. Placeholders (n = XX) stand where a real deck would put numbers from its own result tables.</a:t>
+            </a:r>
           </a:p>
         </p:txBody>
       </p:sp>
@@ -1784,12 +2042,35 @@
           <a:p>
             <a:r>
               <a:rPr lang="en-US" dirty="0"/>
-              <a:t>PATTERN: methods flow. Use it for a processing pipeline of three to five steps; each card says what is done and the key parameter, never a result.
-Design rules shown: one row of equal step cards 0.32 in apart with a small grey arrow between them; accent header '1 · Step' in 14 pt white bold; tint body in 13 pt near-black; one accent icon per card, same size and position (0.6 in, top left of the body); definitions as 14 pt bullets under the row; one take-home line.
-Icons: tabler/grid-scan, tabler/cube-spark, lucide/network, tabler/chart-histogram, lucide/trending-down (MIT / ISC). Parameters (20×, 5 folds) are illustrative settings, not results.
-Illustrative example: a design example, not a real study. Placeholders (n = XX) stand where a real deck would put numbers from its own result tables.</a:t>
-            </a:r>
+              <a:t>PATTERN: methods flow. Use it for a processing pipeline of three to five steps; each card says what is done and the key parameter, never a result.</a:t>
+            </a:r>
+          </a:p>
+          <a:p>
             <a:endParaRPr lang="en-US" dirty="0"/>
+          </a:p>
+          <a:p>
+            <a:r>
+              <a:rPr lang="en-US" dirty="0"/>
+              <a:t>Design rules shown: one row of equal step cards 0.32 in apart with a small gray arrow between them; accent header '1 · Step' in 14 pt white bold; tint body in 13 pt near-black; one accent icon per card, same size and position (0.6 in, top left of the body); definitions as 14 pt bullets under the row; one take-home line.</a:t>
+            </a:r>
+          </a:p>
+          <a:p>
+            <a:endParaRPr lang="en-US" dirty="0"/>
+          </a:p>
+          <a:p>
+            <a:r>
+              <a:rPr lang="en-US" dirty="0"/>
+              <a:t>Icons: tabler/grid-scan, tabler/cube-spark, lucide/network, tabler/chart-histogram, lucide/trending-down (MIT / ISC). Parameters (20×, 5 folds) are illustrative settings, not results.</a:t>
+            </a:r>
+          </a:p>
+          <a:p>
+            <a:endParaRPr lang="en-US" dirty="0"/>
+          </a:p>
+          <a:p>
+            <a:r>
+              <a:rPr lang="en-US" dirty="0"/>
+              <a:t>Illustrative example: a design example, not a real study. Placeholders (n = XX) stand where a real deck would put numbers from its own result tables.</a:t>
+            </a:r>
           </a:p>
         </p:txBody>
       </p:sp>
@@ -1875,12 +2156,35 @@
           <a:p>
             <a:r>
               <a:rPr lang="en-US" dirty="0"/>
-              <a:t>PATTERN: framework diagram (inputs → processing band → outputs). Use it once as the map of the whole analysis; later slides zoom into one part of it.
-Design rules shown: the processing layer is a tint band; steps inside it are white boxes joined by thin grey arrows; outside the band only thick accent arrows, exactly one per input and one per output; inputs on the left, outputs on the right, rows aligned on the same centre lines. Every icon is its own image and every label a native text box, so the diagram can be edited in PowerPoint.
-Icons: lucide/microscope, tabler/stack-2, lucide/clipboard-list (inputs); tabler/chart-histogram, tabler/photo-scan (outputs).
-Illustrative example: a design example, not a real study. Placeholders (n = XX) stand where a real deck would put numbers from its own result tables.</a:t>
-            </a:r>
+              <a:t>PATTERN: framework diagram (inputs → processing band → outputs). Use it once as the map of the whole analysis; later slides zoom into one part of it.</a:t>
+            </a:r>
+          </a:p>
+          <a:p>
             <a:endParaRPr lang="en-US" dirty="0"/>
+          </a:p>
+          <a:p>
+            <a:r>
+              <a:rPr lang="en-US" dirty="0"/>
+              <a:t>Design rules shown: the processing layer is a tint band; steps inside it are white boxes joined by thin gray arrows; outside the band only thick accent arrows, exactly one per input and one per output; inputs on the left, outputs on the right, rows aligned on the same center lines. Every icon is its own image and every label a native text box, so the diagram can be edited in PowerPoint.</a:t>
+            </a:r>
+          </a:p>
+          <a:p>
+            <a:endParaRPr lang="en-US" dirty="0"/>
+          </a:p>
+          <a:p>
+            <a:r>
+              <a:rPr lang="en-US" dirty="0"/>
+              <a:t>Icons: lucide/microscope, tabler/stack-2, lucide/clipboard-list (inputs); tabler/chart-histogram, tabler/photo-scan (outputs).</a:t>
+            </a:r>
+          </a:p>
+          <a:p>
+            <a:endParaRPr lang="en-US" dirty="0"/>
+          </a:p>
+          <a:p>
+            <a:r>
+              <a:rPr lang="en-US" dirty="0"/>
+              <a:t>Illustrative example: a design example, not a real study. Placeholders (n = XX) stand where a real deck would put numbers from its own result tables.</a:t>
+            </a:r>
           </a:p>
         </p:txBody>
       </p:sp>
@@ -1966,12 +2270,35 @@
           <a:p>
             <a:r>
               <a:rPr lang="en-US" dirty="0"/>
-              <a:t>PATTERN: agent loop. Use it to explain an LLM / VLM agent: what it plans, which tools it may call, what it observes and when it stops. A loop reads as iteration; a straight line would hide that the agent revises.
-Design rules shown: four numbered steps on a diamond, one accent icon each (same size, 0.65 in), joined by thin grey arrows; the agent itself in the centre in grey; the tool list on the right as icon + bold name + one line; the stop condition (human sign-off) in a tint box. All shapes and arrows are native and editable.
-Icons: lucide/list-checks, lucide/toolbox, lucide/scan-eye, lucide/message-square-text, lucide/bot, lucide/book-open-text (ISC); tabler/photo-scan, tabler/api (MIT).
-Illustrative example: a design example, not a real study. Placeholders (n = XX) stand where a real deck would put numbers from its own result tables.</a:t>
-            </a:r>
+              <a:t>PATTERN: agent loop. Use it to explain an LLM / VLM agent: what it plans, which tools it may call, what it observes and when it stops. A loop reads as iteration; a straight line would hide that the agent revises.</a:t>
+            </a:r>
+          </a:p>
+          <a:p>
             <a:endParaRPr lang="en-US" dirty="0"/>
+          </a:p>
+          <a:p>
+            <a:r>
+              <a:rPr lang="en-US" dirty="0"/>
+              <a:t>Design rules shown: four numbered steps on a diamond, one accent icon each (same size, 0.65 in), joined by thin gray arrows; the agent itself in the center in gray; the tool list on the right as icon + bold name + one line; the stop condition (human sign-off) in a tint box. All shapes and arrows are native and editable.</a:t>
+            </a:r>
+          </a:p>
+          <a:p>
+            <a:endParaRPr lang="en-US" dirty="0"/>
+          </a:p>
+          <a:p>
+            <a:r>
+              <a:rPr lang="en-US" dirty="0"/>
+              <a:t>Icons: lucide/list-checks, lucide/toolbox, lucide/scan-eye, lucide/message-square-text, lucide/bot, lucide/book-open-text (ISC); tabler/photo-scan, tabler/api (MIT).</a:t>
+            </a:r>
+          </a:p>
+          <a:p>
+            <a:endParaRPr lang="en-US" dirty="0"/>
+          </a:p>
+          <a:p>
+            <a:r>
+              <a:rPr lang="en-US" dirty="0"/>
+              <a:t>Illustrative example: a design example, not a real study. Placeholders (n = XX) stand where a real deck would put numbers from its own result tables.</a:t>
+            </a:r>
           </a:p>
         </p:txBody>
       </p:sp>
@@ -2777,7 +3104,7 @@
                 <a:ea typeface="Arial" pitchFamily="34" charset="-122"/>
                 <a:cs typeface="Arial" pitchFamily="34" charset="-120"/>
               </a:rPr>
-              <a:t>9</a:t>
+              <a:t>10</a:t>
             </a:r>
             <a:endParaRPr lang="en-US" sz="1200" dirty="0"/>
           </a:p>
@@ -3761,7 +4088,7 @@
                 <a:ea typeface="Arial" pitchFamily="34" charset="-122"/>
                 <a:cs typeface="Arial" pitchFamily="34" charset="-120"/>
               </a:rPr>
-              <a:t>10</a:t>
+              <a:t>11</a:t>
             </a:r>
             <a:endParaRPr lang="en-US" sz="1200" dirty="0"/>
           </a:p>
@@ -4462,7 +4789,7 @@
                 <a:ea typeface="Arial" pitchFamily="34" charset="-122"/>
                 <a:cs typeface="Arial" pitchFamily="34" charset="-120"/>
               </a:rPr>
-              <a:t>Cell graph keeps neighbours</a:t>
+              <a:t>Cell graph keeps neighbors</a:t>
             </a:r>
             <a:endParaRPr lang="en-US" sz="1600" dirty="0"/>
           </a:p>
@@ -5549,7 +5876,7 @@
                 <a:ea typeface="Arial" pitchFamily="34" charset="-122"/>
                 <a:cs typeface="Arial" pitchFamily="34" charset="-120"/>
               </a:rPr>
-              <a:t>11</a:t>
+              <a:t>12</a:t>
             </a:r>
             <a:endParaRPr lang="en-US" sz="1200" dirty="0"/>
           </a:p>
@@ -5767,7 +6094,7 @@
                 <a:ea typeface="Arial" pitchFamily="34" charset="-122"/>
                 <a:cs typeface="Arial" pitchFamily="34" charset="-120"/>
               </a:rPr>
-              <a:t>Single-centre cohort</a:t>
+              <a:t>Single-center cohort</a:t>
             </a:r>
             <a:endParaRPr lang="en-US" sz="1800" dirty="0"/>
           </a:p>
@@ -6437,7 +6764,7 @@
                 <a:ea typeface="Arial" pitchFamily="34" charset="-122"/>
                 <a:cs typeface="Arial" pitchFamily="34" charset="-120"/>
               </a:rPr>
-              <a:t>12</a:t>
+              <a:t>13</a:t>
             </a:r>
             <a:endParaRPr lang="en-US" sz="1200" dirty="0"/>
           </a:p>
@@ -7117,7 +7444,7 @@
                 <a:ea typeface="Arial" pitchFamily="34" charset="-122"/>
                 <a:cs typeface="Arial" pitchFamily="34" charset="-120"/>
               </a:rPr>
-              <a:t>13</a:t>
+              <a:t>14</a:t>
             </a:r>
             <a:endParaRPr lang="en-US" sz="1200" dirty="0"/>
           </a:p>
@@ -8340,7 +8667,7 @@
                 <a:ea typeface="Arial" pitchFamily="34" charset="-122"/>
                 <a:cs typeface="Arial" pitchFamily="34" charset="-120"/>
               </a:rPr>
-              <a:t>14</a:t>
+              <a:t>16</a:t>
             </a:r>
             <a:endParaRPr lang="en-US" sz="1200" dirty="0"/>
           </a:p>
@@ -9374,7 +9701,7 @@
                           <a:ea typeface="Arial" pitchFamily="34" charset="-122"/>
                           <a:cs typeface="Arial" pitchFamily="34" charset="-120"/>
                         </a:rPr>
-                        <a:t>Edges; neighbours per cell</a:t>
+                        <a:t>Edges; neighbors per cell</a:t>
                       </a:r>
                       <a:endParaRPr lang="en-US" sz="1200" dirty="0">
                         <a:latin typeface="Arial" charset="0"/>
@@ -9415,7 +9742,7 @@
                           <a:ea typeface="Arial" pitchFamily="34" charset="-122"/>
                           <a:cs typeface="Arial" pitchFamily="34" charset="-120"/>
                         </a:rPr>
-                        <a:t>k-nearest neighbours; k = XX</a:t>
+                        <a:t>k-nearest neighbors; k = XX</a:t>
                       </a:r>
                       <a:endParaRPr lang="en-US" sz="1200" dirty="0">
                         <a:latin typeface="Arial" charset="0"/>
@@ -10326,7 +10653,7 @@
                 <a:ea typeface="Arial" pitchFamily="34" charset="-122"/>
                 <a:cs typeface="Arial" pitchFamily="34" charset="-120"/>
               </a:rPr>
-              <a:t>15</a:t>
+              <a:t>17</a:t>
             </a:r>
             <a:endParaRPr lang="en-US" sz="1200" dirty="0"/>
           </a:p>
@@ -10522,7 +10849,7 @@
                           <a:ea typeface="Arial" pitchFamily="34" charset="-122"/>
                           <a:cs typeface="Arial" pitchFamily="34" charset="-120"/>
                         </a:rPr>
-                        <a:t>Licence</a:t>
+                        <a:t>License</a:t>
                       </a:r>
                       <a:endParaRPr lang="en-US" sz="1200" dirty="0">
                         <a:latin typeface="Arial" charset="0"/>
@@ -11638,7 +11965,7 @@
                 <a:ea typeface="Arial" pitchFamily="34" charset="-122"/>
                 <a:cs typeface="Arial" pitchFamily="34" charset="-120"/>
               </a:rPr>
-              <a:t>1</a:t>
+              <a:t>2</a:t>
             </a:r>
             <a:endParaRPr lang="en-US" sz="1200" dirty="0"/>
           </a:p>
@@ -12481,7 +12808,7 @@
                 <a:ea typeface="Arial" pitchFamily="34" charset="-122"/>
                 <a:cs typeface="Arial" pitchFamily="34" charset="-120"/>
               </a:rPr>
-              <a:t>2</a:t>
+              <a:t>3</a:t>
             </a:r>
             <a:endParaRPr lang="en-US" sz="1200" dirty="0"/>
           </a:p>
@@ -12806,7 +13133,7 @@
                 <a:ea typeface="Arial" pitchFamily="34" charset="-122"/>
                 <a:cs typeface="Arial" pitchFamily="34" charset="-120"/>
               </a:rPr>
-              <a:t>3</a:t>
+              <a:t>4</a:t>
             </a:r>
             <a:endParaRPr lang="en-US" sz="1200" dirty="0"/>
           </a:p>
@@ -13259,7 +13586,7 @@
                 <a:ea typeface="Arial" pitchFamily="34" charset="-122"/>
                 <a:cs typeface="Arial" pitchFamily="34" charset="-120"/>
               </a:rPr>
-              <a:t>4</a:t>
+              <a:t>5</a:t>
             </a:r>
             <a:endParaRPr lang="en-US" sz="1200" dirty="0"/>
           </a:p>
@@ -13957,7 +14284,7 @@
                 <a:ea typeface="Arial" pitchFamily="34" charset="-122"/>
                 <a:cs typeface="Arial" pitchFamily="34" charset="-120"/>
               </a:rPr>
-              <a:t>5</a:t>
+              <a:t>6</a:t>
             </a:r>
             <a:endParaRPr lang="en-US" sz="1200" dirty="0"/>
           </a:p>
@@ -14947,7 +15274,7 @@
                 <a:ea typeface="Arial" pitchFamily="34" charset="-122"/>
                 <a:cs typeface="Arial" pitchFamily="34" charset="-120"/>
               </a:rPr>
-              <a:t>6</a:t>
+              <a:t>7</a:t>
             </a:r>
             <a:endParaRPr lang="en-US" sz="1200" dirty="0"/>
           </a:p>
@@ -15876,7 +16203,7 @@
                 <a:ea typeface="Arial" pitchFamily="34" charset="-122"/>
                 <a:cs typeface="Arial" pitchFamily="34" charset="-120"/>
               </a:rPr>
-              <a:t>pretrained on unlabelled tiles; its weights stay frozen, only later layers train</a:t>
+              <a:t>pretrained on unlabeled tiles; its weights stay frozen, only later layers train</a:t>
             </a:r>
             <a:endParaRPr lang="en-US" sz="1600" dirty="0"/>
           </a:p>
@@ -16240,7 +16567,7 @@
                 <a:ea typeface="Arial" pitchFamily="34" charset="-122"/>
                 <a:cs typeface="Arial" pitchFamily="34" charset="-120"/>
               </a:rPr>
-              <a:t>7</a:t>
+              <a:t>8</a:t>
             </a:r>
             <a:endParaRPr lang="en-US" sz="1200" dirty="0"/>
           </a:p>
@@ -17614,7 +17941,7 @@
                 <a:ea typeface="Arial" pitchFamily="34" charset="-122"/>
                 <a:cs typeface="Arial" pitchFamily="34" charset="-120"/>
               </a:rPr>
-              <a:t>8</a:t>
+              <a:t>9</a:t>
             </a:r>
             <a:endParaRPr lang="en-US" sz="1200" dirty="0"/>
           </a:p>
